--- a/enterprise-architectuur/niveau-1/deel-07/slidedeck.pptx
+++ b/enterprise-architectuur/niveau-1/deel-07/slidedeck.pptx
@@ -4099,7 +4099,7 @@
       </p:sp>
       <p:pic>
         <p:nvPicPr>
-          <p:cNvPr id="3" name="Image 0" descr="c:\Projecten\eductus-trainingen\EnterpriseArchitectuur\_bouwstenen\figuren-generated\fig_7_2_afwijkingenproces.png">    </p:cNvPr>
+          <p:cNvPr id="3" name="Image 0" descr="C:\Projecten\eductus.nl\enterprise-architectuur\figuren\deel-07\fig_7_2_afwijkingenproces.png">    </p:cNvPr>
           <p:cNvPicPr>
             <a:picLocks noChangeAspect="1"/>
           </p:cNvPicPr>
@@ -6229,7 +6229,7 @@
       </p:sp>
       <p:pic>
         <p:nvPicPr>
-          <p:cNvPr id="3" name="Image 0" descr="c:\Projecten\eductus-trainingen\EnterpriseArchitectuur\_bouwstenen\figuren-generated\fig_7_1_drie_stacks.png">    </p:cNvPr>
+          <p:cNvPr id="3" name="Image 0" descr="C:\Projecten\eductus.nl\enterprise-architectuur\figuren\deel-07\fig_7_1_drie_stacks.png">    </p:cNvPr>
           <p:cNvPicPr>
             <a:picLocks noChangeAspect="1"/>
           </p:cNvPicPr>
